--- a/admin/public/nds/kit-digital/nds/station-jeu_A4_bar-2_editable.pptx
+++ b/admin/public/nds/kit-digital/nds/station-jeu_A4_bar-2_editable.pptx
@@ -3458,18 +3458,18 @@
       </p:sp>
       <p:sp>
         <p:nvSpPr>
-          <p:cNvPr id="21" name="Rounded Rectangle 20"/>
+          <p:cNvPr id="12" name="Rounded Rectangle 11"/>
           <p:cNvSpPr/>
           <p:nvPr/>
         </p:nvSpPr>
         <p:spPr>
           <a:xfrm>
-            <a:off x="498136" y="8177309"/>
-            <a:ext cx="1370646" cy="880050"/>
+            <a:off x="469091" y="8279595"/>
+            <a:ext cx="6804000" cy="801900"/>
           </a:xfrm>
           <a:prstGeom prst="roundRect">
             <a:avLst>
-              <a:gd name="adj" fmla="val 18000"/>
+              <a:gd name="adj" fmla="val 25000"/>
             </a:avLst>
           </a:prstGeom>
           <a:solidFill>
@@ -3478,7 +3478,6 @@
           <a:ln>
             <a:noFill/>
           </a:ln>
-          <a:effectLst/>
         </p:spPr>
         <p:style>
           <a:lnRef idx="1">
@@ -3499,6 +3498,7 @@
           <a:lstStyle/>
           <a:p>
             <a:pPr algn="ctr"/>
+            <a:endParaRPr/>
           </a:p>
         </p:txBody>
       </p:sp>
@@ -3526,52 +3526,6 @@
           </a:prstGeom>
         </p:spPr>
       </p:pic>
-      <p:sp>
-        <p:nvSpPr>
-          <p:cNvPr id="22" name="Rounded Rectangle 21"/>
-          <p:cNvSpPr/>
-          <p:nvPr/>
-        </p:nvSpPr>
-        <p:spPr>
-          <a:xfrm>
-            <a:off x="6106700" y="8081849"/>
-            <a:ext cx="1116843" cy="1140815"/>
-          </a:xfrm>
-          <a:prstGeom prst="roundRect">
-            <a:avLst>
-              <a:gd name="adj" fmla="val 18000"/>
-            </a:avLst>
-          </a:prstGeom>
-          <a:solidFill>
-            <a:srgbClr val="FFFFFF"/>
-          </a:solidFill>
-          <a:ln>
-            <a:noFill/>
-          </a:ln>
-          <a:effectLst/>
-        </p:spPr>
-        <p:style>
-          <a:lnRef idx="1">
-            <a:schemeClr val="accent1"/>
-          </a:lnRef>
-          <a:fillRef idx="3">
-            <a:schemeClr val="accent1"/>
-          </a:fillRef>
-          <a:effectRef idx="2">
-            <a:schemeClr val="accent1"/>
-          </a:effectRef>
-          <a:fontRef idx="minor">
-            <a:schemeClr val="lt1"/>
-          </a:fontRef>
-        </p:style>
-        <p:txBody>
-          <a:bodyPr rtlCol="0" anchor="ctr"/>
-          <a:lstStyle/>
-          <a:p>
-            <a:pPr algn="ctr"/>
-          </a:p>
-        </p:txBody>
-      </p:sp>
       <p:pic>
         <p:nvPicPr>
           <p:cNvPr id="14" name="Picture 13" descr="carrosserie-gp.png"/>
@@ -3596,52 +3550,6 @@
           </a:prstGeom>
         </p:spPr>
       </p:pic>
-      <p:sp>
-        <p:nvSpPr>
-          <p:cNvPr id="23" name="Rounded Rectangle 22"/>
-          <p:cNvSpPr/>
-          <p:nvPr/>
-        </p:nvSpPr>
-        <p:spPr>
-          <a:xfrm>
-            <a:off x="2701186" y="8333131"/>
-            <a:ext cx="2157301" cy="676162"/>
-          </a:xfrm>
-          <a:prstGeom prst="roundRect">
-            <a:avLst>
-              <a:gd name="adj" fmla="val 18000"/>
-            </a:avLst>
-          </a:prstGeom>
-          <a:solidFill>
-            <a:srgbClr val="FFFFFF"/>
-          </a:solidFill>
-          <a:ln>
-            <a:noFill/>
-          </a:ln>
-          <a:effectLst/>
-        </p:spPr>
-        <p:style>
-          <a:lnRef idx="1">
-            <a:schemeClr val="accent1"/>
-          </a:lnRef>
-          <a:fillRef idx="3">
-            <a:schemeClr val="accent1"/>
-          </a:fillRef>
-          <a:effectRef idx="2">
-            <a:schemeClr val="accent1"/>
-          </a:effectRef>
-          <a:fontRef idx="minor">
-            <a:schemeClr val="lt1"/>
-          </a:fontRef>
-        </p:style>
-        <p:txBody>
-          <a:bodyPr rtlCol="0" anchor="ctr"/>
-          <a:lstStyle/>
-          <a:p>
-            <a:pPr algn="ctr"/>
-          </a:p>
-        </p:txBody>
-      </p:sp>
       <p:pic>
         <p:nvPicPr>
           <p:cNvPr id="15" name="Picture 14" descr="pegase.png"/>
@@ -3666,52 +3574,6 @@
           </a:prstGeom>
         </p:spPr>
       </p:pic>
-      <p:sp>
-        <p:nvSpPr>
-          <p:cNvPr id="24" name="Rounded Rectangle 23"/>
-          <p:cNvSpPr/>
-          <p:nvPr/>
-        </p:nvSpPr>
-        <p:spPr>
-          <a:xfrm>
-            <a:off x="1856397" y="8318867"/>
-            <a:ext cx="884257" cy="783936"/>
-          </a:xfrm>
-          <a:prstGeom prst="roundRect">
-            <a:avLst>
-              <a:gd name="adj" fmla="val 18000"/>
-            </a:avLst>
-          </a:prstGeom>
-          <a:solidFill>
-            <a:srgbClr val="FFFFFF"/>
-          </a:solidFill>
-          <a:ln>
-            <a:noFill/>
-          </a:ln>
-          <a:effectLst/>
-        </p:spPr>
-        <p:style>
-          <a:lnRef idx="1">
-            <a:schemeClr val="accent1"/>
-          </a:lnRef>
-          <a:fillRef idx="3">
-            <a:schemeClr val="accent1"/>
-          </a:fillRef>
-          <a:effectRef idx="2">
-            <a:schemeClr val="accent1"/>
-          </a:effectRef>
-          <a:fontRef idx="minor">
-            <a:schemeClr val="lt1"/>
-          </a:fontRef>
-        </p:style>
-        <p:txBody>
-          <a:bodyPr rtlCol="0" anchor="ctr"/>
-          <a:lstStyle/>
-          <a:p>
-            <a:pPr algn="ctr"/>
-          </a:p>
-        </p:txBody>
-      </p:sp>
       <p:pic>
         <p:nvPicPr>
           <p:cNvPr id="16" name="Picture 15" descr="charvolin.png"/>
@@ -3736,52 +3598,6 @@
           </a:prstGeom>
         </p:spPr>
       </p:pic>
-      <p:sp>
-        <p:nvSpPr>
-          <p:cNvPr id="25" name="Rounded Rectangle 24"/>
-          <p:cNvSpPr/>
-          <p:nvPr/>
-        </p:nvSpPr>
-        <p:spPr>
-          <a:xfrm>
-            <a:off x="4708961" y="8193643"/>
-            <a:ext cx="1516211" cy="898328"/>
-          </a:xfrm>
-          <a:prstGeom prst="roundRect">
-            <a:avLst>
-              <a:gd name="adj" fmla="val 18000"/>
-            </a:avLst>
-          </a:prstGeom>
-          <a:solidFill>
-            <a:srgbClr val="FFFFFF"/>
-          </a:solidFill>
-          <a:ln>
-            <a:noFill/>
-          </a:ln>
-          <a:effectLst/>
-        </p:spPr>
-        <p:style>
-          <a:lnRef idx="1">
-            <a:schemeClr val="accent1"/>
-          </a:lnRef>
-          <a:fillRef idx="3">
-            <a:schemeClr val="accent1"/>
-          </a:fillRef>
-          <a:effectRef idx="2">
-            <a:schemeClr val="accent1"/>
-          </a:effectRef>
-          <a:fontRef idx="minor">
-            <a:schemeClr val="lt1"/>
-          </a:fontRef>
-        </p:style>
-        <p:txBody>
-          <a:bodyPr rtlCol="0" anchor="ctr"/>
-          <a:lstStyle/>
-          <a:p>
-            <a:pPr algn="ctr"/>
-          </a:p>
-        </p:txBody>
-      </p:sp>
       <p:pic>
         <p:nvPicPr>
           <p:cNvPr id="17" name="Picture 16" descr="nook.png"/>

--- a/admin/public/nds/kit-digital/nds/station-jeu_A4_bar-2_editable.pptx
+++ b/admin/public/nds/kit-digital/nds/station-jeu_A4_bar-2_editable.pptx
@@ -3241,7 +3241,7 @@
                 </a:solidFill>
                 <a:latin typeface="Anton"/>
               </a:rPr>
-              <a:t>STATION JEUX</a:t>
+              <a:t>STATION JEU</a:t>
             </a:r>
           </a:p>
         </p:txBody>
